--- a/Assignments/Requirements Presentation Slides/Josiah Requirements Presentation.pptx
+++ b/Assignments/Requirements Presentation Slides/Josiah Requirements Presentation.pptx
@@ -5690,7 +5690,7 @@
                 <a:cs typeface="Lora Medium"/>
                 <a:sym typeface="Lora Medium"/>
               </a:rPr>
-              <a:t>List yourself for others to join</a:t>
+              <a:t>List yourself for others to join.</a:t>
             </a:r>
             <a:endParaRPr sz="5200">
               <a:solidFill>
@@ -5756,7 +5756,7 @@
                 <a:cs typeface="Lora Medium"/>
                 <a:sym typeface="Lora Medium"/>
               </a:rPr>
-              <a:t>Send an invite to a show</a:t>
+              <a:t>Send an invite to a show.</a:t>
             </a:r>
             <a:endParaRPr sz="5200">
               <a:solidFill>
@@ -5822,7 +5822,7 @@
                 <a:cs typeface="Lora Medium"/>
                 <a:sym typeface="Lora Medium"/>
               </a:rPr>
-              <a:t>Plan ahead of time with a group of friends</a:t>
+              <a:t>Plan ahead of time with a group of friends.</a:t>
             </a:r>
             <a:endParaRPr sz="5200">
               <a:solidFill>
